--- a/pres/12-Unsafe.pptx
+++ b/pres/12-Unsafe.pptx
@@ -14,13 +14,12 @@
     <p:sldId id="332" r:id="rId8"/>
     <p:sldId id="333" r:id="rId9"/>
     <p:sldId id="334" r:id="rId10"/>
-    <p:sldId id="335" r:id="rId11"/>
-    <p:sldId id="336" r:id="rId12"/>
+    <p:sldId id="342" r:id="rId11"/>
+    <p:sldId id="335" r:id="rId12"/>
     <p:sldId id="337" r:id="rId13"/>
     <p:sldId id="338" r:id="rId14"/>
     <p:sldId id="339" r:id="rId15"/>
-    <p:sldId id="340" r:id="rId16"/>
-    <p:sldId id="341" r:id="rId17"/>
+    <p:sldId id="341" r:id="rId16"/>
   </p:sldIdLst>
   <p:sldSz cx="12192000" cy="6858000"/>
   <p:notesSz cx="6858000" cy="9144000"/>
@@ -141,12 +140,11 @@
         </p14:section>
         <p14:section name="Dynamic Loading" id="{BA6C1927-855A-4C88-9F6E-68CB3DB9478D}">
           <p14:sldIdLst>
+            <p14:sldId id="342"/>
             <p14:sldId id="335"/>
-            <p14:sldId id="336"/>
             <p14:sldId id="337"/>
             <p14:sldId id="338"/>
             <p14:sldId id="339"/>
-            <p14:sldId id="340"/>
             <p14:sldId id="341"/>
           </p14:sldIdLst>
         </p14:section>
@@ -308,7 +306,7 @@
           <a:p>
             <a:fld id="{EFAAC8F1-21AA-47EF-82D9-7929EA07D29D}" type="datetimeFigureOut">
               <a:rPr lang="ru-RU" smtClean="0"/>
-              <a:t>28.09.2023</a:t>
+              <a:t>13.01.2024</a:t>
             </a:fld>
             <a:endParaRPr lang="ru-RU"/>
           </a:p>
@@ -508,7 +506,7 @@
           <a:p>
             <a:fld id="{EFAAC8F1-21AA-47EF-82D9-7929EA07D29D}" type="datetimeFigureOut">
               <a:rPr lang="ru-RU" smtClean="0"/>
-              <a:t>28.09.2023</a:t>
+              <a:t>13.01.2024</a:t>
             </a:fld>
             <a:endParaRPr lang="ru-RU"/>
           </a:p>
@@ -718,7 +716,7 @@
           <a:p>
             <a:fld id="{EFAAC8F1-21AA-47EF-82D9-7929EA07D29D}" type="datetimeFigureOut">
               <a:rPr lang="ru-RU" smtClean="0"/>
-              <a:t>28.09.2023</a:t>
+              <a:t>13.01.2024</a:t>
             </a:fld>
             <a:endParaRPr lang="ru-RU"/>
           </a:p>
@@ -918,7 +916,7 @@
           <a:p>
             <a:fld id="{EFAAC8F1-21AA-47EF-82D9-7929EA07D29D}" type="datetimeFigureOut">
               <a:rPr lang="ru-RU" smtClean="0"/>
-              <a:t>28.09.2023</a:t>
+              <a:t>13.01.2024</a:t>
             </a:fld>
             <a:endParaRPr lang="ru-RU"/>
           </a:p>
@@ -1194,7 +1192,7 @@
           <a:p>
             <a:fld id="{EFAAC8F1-21AA-47EF-82D9-7929EA07D29D}" type="datetimeFigureOut">
               <a:rPr lang="ru-RU" smtClean="0"/>
-              <a:t>28.09.2023</a:t>
+              <a:t>13.01.2024</a:t>
             </a:fld>
             <a:endParaRPr lang="ru-RU"/>
           </a:p>
@@ -1462,7 +1460,7 @@
           <a:p>
             <a:fld id="{EFAAC8F1-21AA-47EF-82D9-7929EA07D29D}" type="datetimeFigureOut">
               <a:rPr lang="ru-RU" smtClean="0"/>
-              <a:t>28.09.2023</a:t>
+              <a:t>13.01.2024</a:t>
             </a:fld>
             <a:endParaRPr lang="ru-RU"/>
           </a:p>
@@ -1877,7 +1875,7 @@
           <a:p>
             <a:fld id="{EFAAC8F1-21AA-47EF-82D9-7929EA07D29D}" type="datetimeFigureOut">
               <a:rPr lang="ru-RU" smtClean="0"/>
-              <a:t>28.09.2023</a:t>
+              <a:t>13.01.2024</a:t>
             </a:fld>
             <a:endParaRPr lang="ru-RU"/>
           </a:p>
@@ -2019,7 +2017,7 @@
           <a:p>
             <a:fld id="{EFAAC8F1-21AA-47EF-82D9-7929EA07D29D}" type="datetimeFigureOut">
               <a:rPr lang="ru-RU" smtClean="0"/>
-              <a:t>28.09.2023</a:t>
+              <a:t>13.01.2024</a:t>
             </a:fld>
             <a:endParaRPr lang="ru-RU"/>
           </a:p>
@@ -2132,7 +2130,7 @@
           <a:p>
             <a:fld id="{EFAAC8F1-21AA-47EF-82D9-7929EA07D29D}" type="datetimeFigureOut">
               <a:rPr lang="ru-RU" smtClean="0"/>
-              <a:t>28.09.2023</a:t>
+              <a:t>13.01.2024</a:t>
             </a:fld>
             <a:endParaRPr lang="ru-RU"/>
           </a:p>
@@ -2445,7 +2443,7 @@
           <a:p>
             <a:fld id="{EFAAC8F1-21AA-47EF-82D9-7929EA07D29D}" type="datetimeFigureOut">
               <a:rPr lang="ru-RU" smtClean="0"/>
-              <a:t>28.09.2023</a:t>
+              <a:t>13.01.2024</a:t>
             </a:fld>
             <a:endParaRPr lang="ru-RU"/>
           </a:p>
@@ -2734,7 +2732,7 @@
           <a:p>
             <a:fld id="{EFAAC8F1-21AA-47EF-82D9-7929EA07D29D}" type="datetimeFigureOut">
               <a:rPr lang="ru-RU" smtClean="0"/>
-              <a:t>28.09.2023</a:t>
+              <a:t>13.01.2024</a:t>
             </a:fld>
             <a:endParaRPr lang="ru-RU"/>
           </a:p>
@@ -2977,7 +2975,7 @@
           <a:p>
             <a:fld id="{EFAAC8F1-21AA-47EF-82D9-7929EA07D29D}" type="datetimeFigureOut">
               <a:rPr lang="ru-RU" smtClean="0"/>
-              <a:t>28.09.2023</a:t>
+              <a:t>13.01.2024</a:t>
             </a:fld>
             <a:endParaRPr lang="ru-RU"/>
           </a:p>
@@ -3472,6 +3470,89 @@
 </file>
 
 <file path=ppt/slides/slide10.xml><?xml version="1.0" encoding="utf-8"?>
+<p:sld xmlns:a="http://schemas.openxmlformats.org/drawingml/2006/main" xmlns:r="http://schemas.openxmlformats.org/officeDocument/2006/relationships" xmlns:p="http://schemas.openxmlformats.org/presentationml/2006/main">
+  <p:cSld>
+    <p:spTree>
+      <p:nvGrpSpPr>
+        <p:cNvPr id="1" name=""/>
+        <p:cNvGrpSpPr/>
+        <p:nvPr/>
+      </p:nvGrpSpPr>
+      <p:grpSpPr>
+        <a:xfrm>
+          <a:off x="0" y="0"/>
+          <a:ext cx="0" cy="0"/>
+          <a:chOff x="0" y="0"/>
+          <a:chExt cx="0" cy="0"/>
+        </a:xfrm>
+      </p:grpSpPr>
+      <p:sp>
+        <p:nvSpPr>
+          <p:cNvPr id="4" name="Title 3">
+            <a:extLst>
+              <a:ext uri="{FF2B5EF4-FFF2-40B4-BE49-F238E27FC236}">
+                <a16:creationId xmlns:a16="http://schemas.microsoft.com/office/drawing/2014/main" id="{209398A3-7970-3935-A3E7-E463E1F79E6D}"/>
+              </a:ext>
+            </a:extLst>
+          </p:cNvPr>
+          <p:cNvSpPr>
+            <a:spLocks noGrp="1"/>
+          </p:cNvSpPr>
+          <p:nvPr>
+            <p:ph type="ctrTitle"/>
+          </p:nvPr>
+        </p:nvSpPr>
+        <p:spPr/>
+        <p:txBody>
+          <a:bodyPr/>
+          <a:lstStyle/>
+          <a:p>
+            <a:r>
+              <a:rPr lang="en-CY" dirty="0"/>
+              <a:t>Dynamic Loading &amp; FFi</a:t>
+            </a:r>
+          </a:p>
+        </p:txBody>
+      </p:sp>
+      <p:sp>
+        <p:nvSpPr>
+          <p:cNvPr id="5" name="Subtitle 4">
+            <a:extLst>
+              <a:ext uri="{FF2B5EF4-FFF2-40B4-BE49-F238E27FC236}">
+                <a16:creationId xmlns:a16="http://schemas.microsoft.com/office/drawing/2014/main" id="{67E86634-624E-30A4-AE98-E53B7AD9B810}"/>
+              </a:ext>
+            </a:extLst>
+          </p:cNvPr>
+          <p:cNvSpPr>
+            <a:spLocks noGrp="1"/>
+          </p:cNvSpPr>
+          <p:nvPr>
+            <p:ph type="subTitle" idx="1"/>
+          </p:nvPr>
+        </p:nvSpPr>
+        <p:spPr/>
+        <p:txBody>
+          <a:bodyPr/>
+          <a:lstStyle/>
+          <a:p>
+            <a:endParaRPr lang="en-CY"/>
+          </a:p>
+        </p:txBody>
+      </p:sp>
+    </p:spTree>
+    <p:extLst>
+      <p:ext uri="{BB962C8B-B14F-4D97-AF65-F5344CB8AC3E}">
+        <p14:creationId xmlns:p14="http://schemas.microsoft.com/office/powerpoint/2010/main" val="2771167209"/>
+      </p:ext>
+    </p:extLst>
+  </p:cSld>
+  <p:clrMapOvr>
+    <a:masterClrMapping/>
+  </p:clrMapOvr>
+</p:sld>
+</file>
+
+<file path=ppt/slides/slide11.xml><?xml version="1.0" encoding="utf-8"?>
 <p:sld xmlns:a="http://schemas.openxmlformats.org/drawingml/2006/main" xmlns:r="http://schemas.openxmlformats.org/officeDocument/2006/relationships" xmlns:p="http://schemas.openxmlformats.org/presentationml/2006/main">
   <p:cSld>
     <p:spTree>
@@ -4059,231 +4140,6 @@
 </p:sld>
 </file>
 
-<file path=ppt/slides/slide11.xml><?xml version="1.0" encoding="utf-8"?>
-<p:sld xmlns:a="http://schemas.openxmlformats.org/drawingml/2006/main" xmlns:r="http://schemas.openxmlformats.org/officeDocument/2006/relationships" xmlns:p="http://schemas.openxmlformats.org/presentationml/2006/main">
-  <p:cSld>
-    <p:spTree>
-      <p:nvGrpSpPr>
-        <p:cNvPr id="1" name=""/>
-        <p:cNvGrpSpPr/>
-        <p:nvPr/>
-      </p:nvGrpSpPr>
-      <p:grpSpPr>
-        <a:xfrm>
-          <a:off x="0" y="0"/>
-          <a:ext cx="0" cy="0"/>
-          <a:chOff x="0" y="0"/>
-          <a:chExt cx="0" cy="0"/>
-        </a:xfrm>
-      </p:grpSpPr>
-      <p:sp>
-        <p:nvSpPr>
-          <p:cNvPr id="2" name="Title 1">
-            <a:extLst>
-              <a:ext uri="{FF2B5EF4-FFF2-40B4-BE49-F238E27FC236}">
-                <a16:creationId xmlns:a16="http://schemas.microsoft.com/office/drawing/2014/main" id="{B566F7EF-9C9A-9C8C-007A-21C610F57798}"/>
-              </a:ext>
-            </a:extLst>
-          </p:cNvPr>
-          <p:cNvSpPr>
-            <a:spLocks noGrp="1"/>
-          </p:cNvSpPr>
-          <p:nvPr>
-            <p:ph type="title"/>
-          </p:nvPr>
-        </p:nvSpPr>
-        <p:spPr/>
-        <p:txBody>
-          <a:bodyPr/>
-          <a:lstStyle/>
-          <a:p>
-            <a:r>
-              <a:rPr lang="en-US" dirty="0"/>
-              <a:t>dynamic loading</a:t>
-            </a:r>
-            <a:endParaRPr lang="ru-RU" dirty="0"/>
-          </a:p>
-        </p:txBody>
-      </p:sp>
-      <p:sp>
-        <p:nvSpPr>
-          <p:cNvPr id="3" name="Content Placeholder 2">
-            <a:extLst>
-              <a:ext uri="{FF2B5EF4-FFF2-40B4-BE49-F238E27FC236}">
-                <a16:creationId xmlns:a16="http://schemas.microsoft.com/office/drawing/2014/main" id="{4B2E61CB-6EA5-CCA3-5955-D0470E1C10A2}"/>
-              </a:ext>
-            </a:extLst>
-          </p:cNvPr>
-          <p:cNvSpPr>
-            <a:spLocks noGrp="1"/>
-          </p:cNvSpPr>
-          <p:nvPr>
-            <p:ph idx="1"/>
-          </p:nvPr>
-        </p:nvSpPr>
-        <p:spPr/>
-        <p:txBody>
-          <a:bodyPr/>
-          <a:lstStyle/>
-          <a:p>
-            <a:r>
-              <a:rPr lang="en-US" dirty="0"/>
-              <a:t>-c prefer-dynamic</a:t>
-            </a:r>
-          </a:p>
-          <a:p>
-            <a:r>
-              <a:rPr lang="en-US" dirty="0" err="1"/>
-              <a:t>dylib</a:t>
-            </a:r>
-            <a:endParaRPr lang="en-US" dirty="0"/>
-          </a:p>
-        </p:txBody>
-      </p:sp>
-    </p:spTree>
-    <p:extLst>
-      <p:ext uri="{BB962C8B-B14F-4D97-AF65-F5344CB8AC3E}">
-        <p14:creationId xmlns:p14="http://schemas.microsoft.com/office/powerpoint/2010/main" val="2801451923"/>
-      </p:ext>
-    </p:extLst>
-  </p:cSld>
-  <p:clrMapOvr>
-    <a:masterClrMapping/>
-  </p:clrMapOvr>
-  <p:timing>
-    <p:tnLst>
-      <p:par>
-        <p:cTn id="1" dur="indefinite" restart="never" nodeType="tmRoot">
-          <p:childTnLst>
-            <p:seq concurrent="1" nextAc="seek">
-              <p:cTn id="2" dur="indefinite" nodeType="mainSeq">
-                <p:childTnLst>
-                  <p:par>
-                    <p:cTn id="3" fill="hold">
-                      <p:stCondLst>
-                        <p:cond delay="indefinite"/>
-                      </p:stCondLst>
-                      <p:childTnLst>
-                        <p:par>
-                          <p:cTn id="4" fill="hold">
-                            <p:stCondLst>
-                              <p:cond delay="0"/>
-                            </p:stCondLst>
-                            <p:childTnLst>
-                              <p:par>
-                                <p:cTn id="5" presetID="1" presetClass="entr" presetSubtype="0" fill="hold" grpId="0" nodeType="clickEffect">
-                                  <p:stCondLst>
-                                    <p:cond delay="0"/>
-                                  </p:stCondLst>
-                                  <p:childTnLst>
-                                    <p:set>
-                                      <p:cBhvr>
-                                        <p:cTn id="6" dur="1" fill="hold">
-                                          <p:stCondLst>
-                                            <p:cond delay="0"/>
-                                          </p:stCondLst>
-                                        </p:cTn>
-                                        <p:tgtEl>
-                                          <p:spTgt spid="3">
-                                            <p:txEl>
-                                              <p:pRg st="0" end="0"/>
-                                            </p:txEl>
-                                          </p:spTgt>
-                                        </p:tgtEl>
-                                        <p:attrNameLst>
-                                          <p:attrName>style.visibility</p:attrName>
-                                        </p:attrNameLst>
-                                      </p:cBhvr>
-                                      <p:to>
-                                        <p:strVal val="visible"/>
-                                      </p:to>
-                                    </p:set>
-                                  </p:childTnLst>
-                                </p:cTn>
-                              </p:par>
-                            </p:childTnLst>
-                          </p:cTn>
-                        </p:par>
-                      </p:childTnLst>
-                    </p:cTn>
-                  </p:par>
-                  <p:par>
-                    <p:cTn id="7" fill="hold">
-                      <p:stCondLst>
-                        <p:cond delay="indefinite"/>
-                      </p:stCondLst>
-                      <p:childTnLst>
-                        <p:par>
-                          <p:cTn id="8" fill="hold">
-                            <p:stCondLst>
-                              <p:cond delay="0"/>
-                            </p:stCondLst>
-                            <p:childTnLst>
-                              <p:par>
-                                <p:cTn id="9" presetID="1" presetClass="entr" presetSubtype="0" fill="hold" grpId="0" nodeType="clickEffect">
-                                  <p:stCondLst>
-                                    <p:cond delay="0"/>
-                                  </p:stCondLst>
-                                  <p:childTnLst>
-                                    <p:set>
-                                      <p:cBhvr>
-                                        <p:cTn id="10" dur="1" fill="hold">
-                                          <p:stCondLst>
-                                            <p:cond delay="0"/>
-                                          </p:stCondLst>
-                                        </p:cTn>
-                                        <p:tgtEl>
-                                          <p:spTgt spid="3">
-                                            <p:txEl>
-                                              <p:pRg st="1" end="1"/>
-                                            </p:txEl>
-                                          </p:spTgt>
-                                        </p:tgtEl>
-                                        <p:attrNameLst>
-                                          <p:attrName>style.visibility</p:attrName>
-                                        </p:attrNameLst>
-                                      </p:cBhvr>
-                                      <p:to>
-                                        <p:strVal val="visible"/>
-                                      </p:to>
-                                    </p:set>
-                                  </p:childTnLst>
-                                </p:cTn>
-                              </p:par>
-                            </p:childTnLst>
-                          </p:cTn>
-                        </p:par>
-                      </p:childTnLst>
-                    </p:cTn>
-                  </p:par>
-                </p:childTnLst>
-              </p:cTn>
-              <p:prevCondLst>
-                <p:cond evt="onPrev" delay="0">
-                  <p:tgtEl>
-                    <p:sldTgt/>
-                  </p:tgtEl>
-                </p:cond>
-              </p:prevCondLst>
-              <p:nextCondLst>
-                <p:cond evt="onNext" delay="0">
-                  <p:tgtEl>
-                    <p:sldTgt/>
-                  </p:tgtEl>
-                </p:cond>
-              </p:nextCondLst>
-            </p:seq>
-          </p:childTnLst>
-        </p:cTn>
-      </p:par>
-    </p:tnLst>
-    <p:bldLst>
-      <p:bldP spid="3" grpId="0" build="p"/>
-    </p:bldLst>
-  </p:timing>
-</p:sld>
-</file>
-
 <file path=ppt/slides/slide12.xml><?xml version="1.0" encoding="utf-8"?>
 <p:sld xmlns:a="http://schemas.openxmlformats.org/drawingml/2006/main" xmlns:r="http://schemas.openxmlformats.org/officeDocument/2006/relationships" xmlns:p="http://schemas.openxmlformats.org/presentationml/2006/main">
   <p:cSld>
@@ -4999,266 +4855,6 @@
 </file>
 
 <file path=ppt/slides/slide15.xml><?xml version="1.0" encoding="utf-8"?>
-<p:sld xmlns:a="http://schemas.openxmlformats.org/drawingml/2006/main" xmlns:r="http://schemas.openxmlformats.org/officeDocument/2006/relationships" xmlns:p="http://schemas.openxmlformats.org/presentationml/2006/main">
-  <p:cSld>
-    <p:spTree>
-      <p:nvGrpSpPr>
-        <p:cNvPr id="1" name=""/>
-        <p:cNvGrpSpPr/>
-        <p:nvPr/>
-      </p:nvGrpSpPr>
-      <p:grpSpPr>
-        <a:xfrm>
-          <a:off x="0" y="0"/>
-          <a:ext cx="0" cy="0"/>
-          <a:chOff x="0" y="0"/>
-          <a:chExt cx="0" cy="0"/>
-        </a:xfrm>
-      </p:grpSpPr>
-      <p:sp>
-        <p:nvSpPr>
-          <p:cNvPr id="2" name="Title 1">
-            <a:extLst>
-              <a:ext uri="{FF2B5EF4-FFF2-40B4-BE49-F238E27FC236}">
-                <a16:creationId xmlns:a16="http://schemas.microsoft.com/office/drawing/2014/main" id="{89911A5C-A9F1-BA6F-6532-558265B4368D}"/>
-              </a:ext>
-            </a:extLst>
-          </p:cNvPr>
-          <p:cNvSpPr>
-            <a:spLocks noGrp="1"/>
-          </p:cNvSpPr>
-          <p:nvPr>
-            <p:ph type="title"/>
-          </p:nvPr>
-        </p:nvSpPr>
-        <p:spPr/>
-        <p:txBody>
-          <a:bodyPr/>
-          <a:lstStyle/>
-          <a:p>
-            <a:r>
-              <a:rPr lang="en-US" dirty="0"/>
-              <a:t>Linkage C-Like</a:t>
-            </a:r>
-            <a:endParaRPr lang="ru-RU" dirty="0"/>
-          </a:p>
-        </p:txBody>
-      </p:sp>
-      <p:sp>
-        <p:nvSpPr>
-          <p:cNvPr id="3" name="Content Placeholder 2">
-            <a:extLst>
-              <a:ext uri="{FF2B5EF4-FFF2-40B4-BE49-F238E27FC236}">
-                <a16:creationId xmlns:a16="http://schemas.microsoft.com/office/drawing/2014/main" id="{4803005C-55ED-D407-ADD1-1BA7FAE7AFF4}"/>
-              </a:ext>
-            </a:extLst>
-          </p:cNvPr>
-          <p:cNvSpPr>
-            <a:spLocks noGrp="1"/>
-          </p:cNvSpPr>
-          <p:nvPr>
-            <p:ph idx="1"/>
-          </p:nvPr>
-        </p:nvSpPr>
-        <p:spPr/>
-        <p:txBody>
-          <a:bodyPr/>
-          <a:lstStyle/>
-          <a:p>
-            <a:r>
-              <a:rPr lang="en-US" dirty="0" err="1"/>
-              <a:t>cdylib</a:t>
-            </a:r>
-            <a:endParaRPr lang="en-US" dirty="0"/>
-          </a:p>
-          <a:p>
-            <a:pPr lvl="1"/>
-            <a:r>
-              <a:rPr lang="en-US" dirty="0"/>
-              <a:t>so, </a:t>
-            </a:r>
-            <a:r>
-              <a:rPr lang="en-US" dirty="0" err="1"/>
-              <a:t>dylib</a:t>
-            </a:r>
-            <a:r>
-              <a:rPr lang="en-US" dirty="0"/>
-              <a:t>, </a:t>
-            </a:r>
-            <a:r>
-              <a:rPr lang="en-US" dirty="0" err="1"/>
-              <a:t>dll</a:t>
-            </a:r>
-            <a:endParaRPr lang="en-US" dirty="0"/>
-          </a:p>
-          <a:p>
-            <a:pPr lvl="1"/>
-            <a:r>
-              <a:rPr lang="en-US" dirty="0"/>
-              <a:t>FFI</a:t>
-            </a:r>
-            <a:endParaRPr lang="ru-RU" dirty="0"/>
-          </a:p>
-        </p:txBody>
-      </p:sp>
-    </p:spTree>
-    <p:extLst>
-      <p:ext uri="{BB962C8B-B14F-4D97-AF65-F5344CB8AC3E}">
-        <p14:creationId xmlns:p14="http://schemas.microsoft.com/office/powerpoint/2010/main" val="4058209811"/>
-      </p:ext>
-    </p:extLst>
-  </p:cSld>
-  <p:clrMapOvr>
-    <a:masterClrMapping/>
-  </p:clrMapOvr>
-  <p:timing>
-    <p:tnLst>
-      <p:par>
-        <p:cTn id="1" dur="indefinite" restart="never" nodeType="tmRoot">
-          <p:childTnLst>
-            <p:seq concurrent="1" nextAc="seek">
-              <p:cTn id="2" dur="indefinite" nodeType="mainSeq">
-                <p:childTnLst>
-                  <p:par>
-                    <p:cTn id="3" fill="hold">
-                      <p:stCondLst>
-                        <p:cond delay="indefinite"/>
-                      </p:stCondLst>
-                      <p:childTnLst>
-                        <p:par>
-                          <p:cTn id="4" fill="hold">
-                            <p:stCondLst>
-                              <p:cond delay="0"/>
-                            </p:stCondLst>
-                            <p:childTnLst>
-                              <p:par>
-                                <p:cTn id="5" presetID="1" presetClass="entr" presetSubtype="0" fill="hold" grpId="0" nodeType="clickEffect">
-                                  <p:stCondLst>
-                                    <p:cond delay="0"/>
-                                  </p:stCondLst>
-                                  <p:childTnLst>
-                                    <p:set>
-                                      <p:cBhvr>
-                                        <p:cTn id="6" dur="1" fill="hold">
-                                          <p:stCondLst>
-                                            <p:cond delay="0"/>
-                                          </p:stCondLst>
-                                        </p:cTn>
-                                        <p:tgtEl>
-                                          <p:spTgt spid="3">
-                                            <p:txEl>
-                                              <p:pRg st="0" end="0"/>
-                                            </p:txEl>
-                                          </p:spTgt>
-                                        </p:tgtEl>
-                                        <p:attrNameLst>
-                                          <p:attrName>style.visibility</p:attrName>
-                                        </p:attrNameLst>
-                                      </p:cBhvr>
-                                      <p:to>
-                                        <p:strVal val="visible"/>
-                                      </p:to>
-                                    </p:set>
-                                  </p:childTnLst>
-                                </p:cTn>
-                              </p:par>
-                              <p:par>
-                                <p:cTn id="7" presetID="1" presetClass="entr" presetSubtype="0" fill="hold" grpId="0" nodeType="withEffect">
-                                  <p:stCondLst>
-                                    <p:cond delay="0"/>
-                                  </p:stCondLst>
-                                  <p:childTnLst>
-                                    <p:set>
-                                      <p:cBhvr>
-                                        <p:cTn id="8" dur="1" fill="hold">
-                                          <p:stCondLst>
-                                            <p:cond delay="0"/>
-                                          </p:stCondLst>
-                                        </p:cTn>
-                                        <p:tgtEl>
-                                          <p:spTgt spid="3">
-                                            <p:txEl>
-                                              <p:pRg st="1" end="1"/>
-                                            </p:txEl>
-                                          </p:spTgt>
-                                        </p:tgtEl>
-                                        <p:attrNameLst>
-                                          <p:attrName>style.visibility</p:attrName>
-                                        </p:attrNameLst>
-                                      </p:cBhvr>
-                                      <p:to>
-                                        <p:strVal val="visible"/>
-                                      </p:to>
-                                    </p:set>
-                                  </p:childTnLst>
-                                </p:cTn>
-                              </p:par>
-                              <p:par>
-                                <p:cTn id="9" presetID="1" presetClass="entr" presetSubtype="0" fill="hold" grpId="0" nodeType="withEffect">
-                                  <p:stCondLst>
-                                    <p:cond delay="0"/>
-                                  </p:stCondLst>
-                                  <p:childTnLst>
-                                    <p:set>
-                                      <p:cBhvr>
-                                        <p:cTn id="10" dur="1" fill="hold">
-                                          <p:stCondLst>
-                                            <p:cond delay="0"/>
-                                          </p:stCondLst>
-                                        </p:cTn>
-                                        <p:tgtEl>
-                                          <p:spTgt spid="3">
-                                            <p:txEl>
-                                              <p:pRg st="2" end="2"/>
-                                            </p:txEl>
-                                          </p:spTgt>
-                                        </p:tgtEl>
-                                        <p:attrNameLst>
-                                          <p:attrName>style.visibility</p:attrName>
-                                        </p:attrNameLst>
-                                      </p:cBhvr>
-                                      <p:to>
-                                        <p:strVal val="visible"/>
-                                      </p:to>
-                                    </p:set>
-                                  </p:childTnLst>
-                                </p:cTn>
-                              </p:par>
-                            </p:childTnLst>
-                          </p:cTn>
-                        </p:par>
-                      </p:childTnLst>
-                    </p:cTn>
-                  </p:par>
-                </p:childTnLst>
-              </p:cTn>
-              <p:prevCondLst>
-                <p:cond evt="onPrev" delay="0">
-                  <p:tgtEl>
-                    <p:sldTgt/>
-                  </p:tgtEl>
-                </p:cond>
-              </p:prevCondLst>
-              <p:nextCondLst>
-                <p:cond evt="onNext" delay="0">
-                  <p:tgtEl>
-                    <p:sldTgt/>
-                  </p:tgtEl>
-                </p:cond>
-              </p:nextCondLst>
-            </p:seq>
-          </p:childTnLst>
-        </p:cTn>
-      </p:par>
-    </p:tnLst>
-    <p:bldLst>
-      <p:bldP spid="3" grpId="0" build="p"/>
-    </p:bldLst>
-  </p:timing>
-</p:sld>
-</file>
-
-<file path=ppt/slides/slide16.xml><?xml version="1.0" encoding="utf-8"?>
 <p:sld xmlns:a="http://schemas.openxmlformats.org/drawingml/2006/main" xmlns:r="http://schemas.openxmlformats.org/officeDocument/2006/relationships" xmlns:p="http://schemas.openxmlformats.org/presentationml/2006/main">
   <p:cSld>
     <p:spTree>
